--- a/thesis/presentation.pptx
+++ b/thesis/presentation.pptx
@@ -4683,7 +4683,25 @@
                 </a:solidFill>
                 <a:latin typeface="DM Sans"/>
               </a:rPr>
-              <a:t>Bu veri setinde meşru ve zararlı URL’ler dengeli dağılmıştır. Yaklaşık 330 bin URL bilgisi bulunmaktadır.</a:t>
+              <a:t>Bu veri setinde meşru ve zararlı URL’ler dengeli dağılmıştır. </a:t>
+            </a:r>
+            <a:r>
+              <a:rPr lang="tr-TR" sz="1125" dirty="0">
+                <a:solidFill>
+                  <a:srgbClr val="475569"/>
+                </a:solidFill>
+                <a:latin typeface="DM Sans"/>
+              </a:rPr>
+              <a:t>336</a:t>
+            </a:r>
+            <a:r>
+              <a:rPr lang="tr-TR" sz="1125" b="0" i="0" u="none" dirty="0">
+                <a:solidFill>
+                  <a:srgbClr val="475569"/>
+                </a:solidFill>
+                <a:latin typeface="DM Sans"/>
+              </a:rPr>
+              <a:t> bin 750 URL bilgisi bulunmaktadır.</a:t>
             </a:r>
             <a:endParaRPr sz="1125" b="0" i="0" u="none" dirty="0">
               <a:solidFill>
@@ -18829,7 +18847,7 @@
                 </a:solidFill>
                 <a:latin typeface="DM Sans"/>
               </a:rPr>
-              <a:t>350,000+</a:t>
+              <a:t>336750</a:t>
             </a:r>
             <a:r>
               <a:rPr sz="1125" b="0" i="0" u="none" dirty="0">
@@ -24666,7 +24684,7 @@
         </p:nvSpPr>
         <p:spPr>
           <a:xfrm>
-            <a:off x="6572250" y="1490662"/>
+            <a:off x="6572250" y="1309687"/>
             <a:ext cx="5050631" cy="219075"/>
           </a:xfrm>
           <a:prstGeom prst="rect">
@@ -24682,14 +24700,38 @@
           <a:p>
             <a:pPr algn="l"/>
             <a:r>
-              <a:rPr sz="1350" b="1" i="0" u="none">
+              <a:rPr sz="1350" b="1" i="0" u="none" dirty="0" err="1">
                 <a:solidFill>
                   <a:srgbClr val="005088"/>
                 </a:solidFill>
                 <a:latin typeface="Merriweather"/>
               </a:rPr>
-              <a:t>Bulguların Değerlendirilmesi</a:t>
-            </a:r>
+              <a:t>Bulguların</a:t>
+            </a:r>
+            <a:r>
+              <a:rPr sz="1350" b="1" i="0" u="none" dirty="0">
+                <a:solidFill>
+                  <a:srgbClr val="005088"/>
+                </a:solidFill>
+                <a:latin typeface="Merriweather"/>
+              </a:rPr>
+              <a:t> </a:t>
+            </a:r>
+            <a:r>
+              <a:rPr sz="1350" b="1" i="0" u="none" dirty="0" err="1">
+                <a:solidFill>
+                  <a:srgbClr val="005088"/>
+                </a:solidFill>
+                <a:latin typeface="Merriweather"/>
+              </a:rPr>
+              <a:t>Değerlendirilmesi</a:t>
+            </a:r>
+            <a:endParaRPr sz="1350" b="1" i="0" u="none" dirty="0">
+              <a:solidFill>
+                <a:srgbClr val="005088"/>
+              </a:solidFill>
+              <a:latin typeface="Merriweather"/>
+            </a:endParaRPr>
           </a:p>
         </p:txBody>
       </p:sp>
@@ -24701,7 +24743,7 @@
         </p:nvSpPr>
         <p:spPr>
           <a:xfrm>
-            <a:off x="6572250" y="1804987"/>
+            <a:off x="6572250" y="1600605"/>
             <a:ext cx="4810125" cy="906851"/>
           </a:xfrm>
           <a:prstGeom prst="rect">
@@ -24799,7 +24841,33 @@
                 </a:solidFill>
                 <a:latin typeface="DM Sans"/>
               </a:rPr>
-              <a:t>0.3069 (URL/Yol oranı)</a:t>
+              <a:t>0.</a:t>
+            </a:r>
+            <a:r>
+              <a:rPr lang="tr-TR" sz="1200" b="1" dirty="0"/>
+              <a:t> </a:t>
+            </a:r>
+            <a:r>
+              <a:rPr lang="tr-TR" sz="1200" dirty="0">
+                <a:solidFill>
+                  <a:srgbClr val="334155"/>
+                </a:solidFill>
+                <a:latin typeface="DM Sans"/>
+              </a:rPr>
+              <a:t>5570</a:t>
+            </a:r>
+            <a:r>
+              <a:rPr lang="tr-TR" sz="1200" dirty="0"/>
+              <a:t> </a:t>
+            </a:r>
+            <a:r>
+              <a:rPr lang="tr-TR" sz="1200" dirty="0">
+                <a:solidFill>
+                  <a:srgbClr val="334155"/>
+                </a:solidFill>
+                <a:latin typeface="DM Sans"/>
+              </a:rPr>
+              <a:t> (Alan adının URL içindeki oranı)</a:t>
             </a:r>
             <a:endParaRPr sz="1200" dirty="0">
               <a:solidFill>
@@ -28564,7 +28632,7 @@
         <p:spPr>
           <a:xfrm>
             <a:off x="819150" y="2452687"/>
-            <a:ext cx="3028950" cy="857250"/>
+            <a:ext cx="3028950" cy="858761"/>
           </a:xfrm>
           <a:prstGeom prst="rect">
             <a:avLst/>
@@ -28643,7 +28711,16 @@
                 </a:solidFill>
                 <a:latin typeface="DM Sans"/>
               </a:rPr>
-              <a:t>336.</a:t>
+              <a:t>336,</a:t>
+            </a:r>
+            <a:r>
+              <a:rPr lang="tr-TR" sz="1125" dirty="0">
+                <a:solidFill>
+                  <a:srgbClr val="64748B"/>
+                </a:solidFill>
+                <a:latin typeface="DM Sans"/>
+              </a:rPr>
+              <a:t>750</a:t>
             </a:r>
             <a:r>
               <a:rPr sz="1125" b="0" i="0" u="none" dirty="0">
@@ -28652,7 +28729,7 @@
                 </a:solidFill>
                 <a:latin typeface="DM Sans"/>
               </a:rPr>
-              <a:t>000+ URL </a:t>
+              <a:t> URL </a:t>
             </a:r>
             <a:r>
               <a:rPr sz="1125" b="0" i="0" u="none" dirty="0" err="1">
@@ -28670,7 +28747,25 @@
                 </a:solidFill>
                 <a:latin typeface="DM Sans"/>
               </a:rPr>
-              <a:t> %99.88 </a:t>
+              <a:t> %99.</a:t>
+            </a:r>
+            <a:r>
+              <a:rPr lang="tr-TR" sz="1125" b="0" i="0" u="none" dirty="0">
+                <a:solidFill>
+                  <a:srgbClr val="64748B"/>
+                </a:solidFill>
+                <a:latin typeface="DM Sans"/>
+              </a:rPr>
+              <a:t>76</a:t>
+            </a:r>
+            <a:r>
+              <a:rPr sz="1125" b="0" i="0" u="none" dirty="0">
+                <a:solidFill>
+                  <a:srgbClr val="64748B"/>
+                </a:solidFill>
+                <a:latin typeface="DM Sans"/>
+              </a:rPr>
+              <a:t> </a:t>
             </a:r>
             <a:r>
               <a:rPr sz="1125" b="0" i="0" u="none" dirty="0" err="1">

--- a/thesis/presentation.pptx
+++ b/thesis/presentation.pptx
@@ -327,7 +327,7 @@
           <a:p>
             <a:fld id="{5BCAD085-E8A6-8845-BD4E-CB4CCA059FC4}" type="datetimeFigureOut">
               <a:rPr lang="en-US" smtClean="0"/>
-              <a:t>7/26/2026</a:t>
+              <a:t>7/27/26</a:t>
             </a:fld>
             <a:endParaRPr lang="en-US"/>
           </a:p>
@@ -495,7 +495,7 @@
           <a:p>
             <a:fld id="{5BCAD085-E8A6-8845-BD4E-CB4CCA059FC4}" type="datetimeFigureOut">
               <a:rPr lang="en-US" smtClean="0"/>
-              <a:t>7/26/2026</a:t>
+              <a:t>7/27/26</a:t>
             </a:fld>
             <a:endParaRPr lang="en-US"/>
           </a:p>
@@ -673,7 +673,7 @@
           <a:p>
             <a:fld id="{5BCAD085-E8A6-8845-BD4E-CB4CCA059FC4}" type="datetimeFigureOut">
               <a:rPr lang="en-US" smtClean="0"/>
-              <a:t>7/26/2026</a:t>
+              <a:t>7/27/26</a:t>
             </a:fld>
             <a:endParaRPr lang="en-US"/>
           </a:p>
@@ -841,7 +841,7 @@
           <a:p>
             <a:fld id="{5BCAD085-E8A6-8845-BD4E-CB4CCA059FC4}" type="datetimeFigureOut">
               <a:rPr lang="en-US" smtClean="0"/>
-              <a:t>7/26/2026</a:t>
+              <a:t>7/27/26</a:t>
             </a:fld>
             <a:endParaRPr lang="en-US"/>
           </a:p>
@@ -1086,7 +1086,7 @@
           <a:p>
             <a:fld id="{5BCAD085-E8A6-8845-BD4E-CB4CCA059FC4}" type="datetimeFigureOut">
               <a:rPr lang="en-US" smtClean="0"/>
-              <a:t>7/26/2026</a:t>
+              <a:t>7/27/26</a:t>
             </a:fld>
             <a:endParaRPr lang="en-US"/>
           </a:p>
@@ -1371,7 +1371,7 @@
           <a:p>
             <a:fld id="{5BCAD085-E8A6-8845-BD4E-CB4CCA059FC4}" type="datetimeFigureOut">
               <a:rPr lang="en-US" smtClean="0"/>
-              <a:t>7/26/2026</a:t>
+              <a:t>7/27/26</a:t>
             </a:fld>
             <a:endParaRPr lang="en-US"/>
           </a:p>
@@ -1790,7 +1790,7 @@
           <a:p>
             <a:fld id="{5BCAD085-E8A6-8845-BD4E-CB4CCA059FC4}" type="datetimeFigureOut">
               <a:rPr lang="en-US" smtClean="0"/>
-              <a:t>7/26/2026</a:t>
+              <a:t>7/27/26</a:t>
             </a:fld>
             <a:endParaRPr lang="en-US"/>
           </a:p>
@@ -1907,7 +1907,7 @@
           <a:p>
             <a:fld id="{5BCAD085-E8A6-8845-BD4E-CB4CCA059FC4}" type="datetimeFigureOut">
               <a:rPr lang="en-US" smtClean="0"/>
-              <a:t>7/26/2026</a:t>
+              <a:t>7/27/26</a:t>
             </a:fld>
             <a:endParaRPr lang="en-US"/>
           </a:p>
@@ -2002,7 +2002,7 @@
           <a:p>
             <a:fld id="{5BCAD085-E8A6-8845-BD4E-CB4CCA059FC4}" type="datetimeFigureOut">
               <a:rPr lang="en-US" smtClean="0"/>
-              <a:t>7/26/2026</a:t>
+              <a:t>7/27/26</a:t>
             </a:fld>
             <a:endParaRPr lang="en-US"/>
           </a:p>
@@ -2277,7 +2277,7 @@
           <a:p>
             <a:fld id="{5BCAD085-E8A6-8845-BD4E-CB4CCA059FC4}" type="datetimeFigureOut">
               <a:rPr lang="en-US" smtClean="0"/>
-              <a:t>7/26/2026</a:t>
+              <a:t>7/27/26</a:t>
             </a:fld>
             <a:endParaRPr lang="en-US"/>
           </a:p>
@@ -2529,7 +2529,7 @@
           <a:p>
             <a:fld id="{5BCAD085-E8A6-8845-BD4E-CB4CCA059FC4}" type="datetimeFigureOut">
               <a:rPr lang="en-US" smtClean="0"/>
-              <a:t>7/26/2026</a:t>
+              <a:t>7/27/26</a:t>
             </a:fld>
             <a:endParaRPr lang="en-US"/>
           </a:p>
@@ -2740,7 +2740,7 @@
           <a:p>
             <a:fld id="{5BCAD085-E8A6-8845-BD4E-CB4CCA059FC4}" type="datetimeFigureOut">
               <a:rPr lang="en-US" smtClean="0"/>
-              <a:t>7/26/2026</a:t>
+              <a:t>7/27/26</a:t>
             </a:fld>
             <a:endParaRPr lang="en-US"/>
           </a:p>
@@ -3955,7 +3955,7 @@
         <p:spPr>
           <a:xfrm>
             <a:off x="11201400" y="6534150"/>
-            <a:ext cx="323850" cy="133350"/>
+            <a:ext cx="477982" cy="126958"/>
           </a:xfrm>
           <a:prstGeom prst="rect">
             <a:avLst/>
@@ -3976,8 +3976,23 @@
                 </a:solidFill>
                 <a:latin typeface="DM Sans"/>
               </a:rPr>
-              <a:t>Slayt 6</a:t>
-            </a:r>
+              <a:t>Slayt </a:t>
+            </a:r>
+            <a:r>
+              <a:rPr lang="tr-TR" sz="825" b="0" i="0" u="none">
+                <a:solidFill>
+                  <a:srgbClr val="94A3B8"/>
+                </a:solidFill>
+                <a:latin typeface="DM Sans"/>
+              </a:rPr>
+              <a:t>10</a:t>
+            </a:r>
+            <a:endParaRPr sz="825" b="0" i="0" u="none">
+              <a:solidFill>
+                <a:srgbClr val="94A3B8"/>
+              </a:solidFill>
+              <a:latin typeface="DM Sans"/>
+            </a:endParaRPr>
           </a:p>
         </p:txBody>
       </p:sp>
@@ -9939,7 +9954,7 @@
         <p:spPr>
           <a:xfrm>
             <a:off x="11201400" y="6534150"/>
-            <a:ext cx="323850" cy="133350"/>
+            <a:ext cx="457200" cy="126958"/>
           </a:xfrm>
           <a:prstGeom prst="rect">
             <a:avLst/>
@@ -9960,7 +9975,16 @@
                 </a:solidFill>
                 <a:latin typeface="DM Sans"/>
               </a:rPr>
-              <a:t>Slayt 8</a:t>
+              <a:t>Slayt </a:t>
+            </a:r>
+            <a:r>
+              <a:rPr lang="tr-TR" sz="825" b="0" i="0" u="none">
+                <a:solidFill>
+                  <a:srgbClr val="94A3B8"/>
+                </a:solidFill>
+                <a:latin typeface="DM Sans"/>
+              </a:rPr>
+              <a:t>15</a:t>
             </a:r>
           </a:p>
         </p:txBody>
@@ -10545,8 +10569,23 @@
                 </a:solidFill>
                 <a:latin typeface="DM Sans"/>
               </a:rPr>
-              <a:t>Slayt 18</a:t>
-            </a:r>
+              <a:t>Slayt 1</a:t>
+            </a:r>
+            <a:r>
+              <a:rPr lang="tr-TR" sz="900" b="0" i="0" u="none">
+                <a:solidFill>
+                  <a:srgbClr val="94A3B8"/>
+                </a:solidFill>
+                <a:latin typeface="DM Sans"/>
+              </a:rPr>
+              <a:t>6</a:t>
+            </a:r>
+            <a:endParaRPr sz="900" b="0" i="0" u="none">
+              <a:solidFill>
+                <a:srgbClr val="94A3B8"/>
+              </a:solidFill>
+              <a:latin typeface="DM Sans"/>
+            </a:endParaRPr>
           </a:p>
         </p:txBody>
       </p:sp>
@@ -13287,8 +13326,8 @@
         </p:nvSpPr>
         <p:spPr>
           <a:xfrm>
-            <a:off x="11201400" y="6534150"/>
-            <a:ext cx="323850" cy="133350"/>
+            <a:off x="11201399" y="6534150"/>
+            <a:ext cx="467591" cy="126958"/>
           </a:xfrm>
           <a:prstGeom prst="rect">
             <a:avLst/>
@@ -13309,8 +13348,23 @@
                 </a:solidFill>
                 <a:latin typeface="DM Sans"/>
               </a:rPr>
-              <a:t>Slayt 8</a:t>
-            </a:r>
+              <a:t>Slayt </a:t>
+            </a:r>
+            <a:r>
+              <a:rPr lang="tr-TR" sz="825" b="0" i="0" u="none">
+                <a:solidFill>
+                  <a:srgbClr val="94A3B8"/>
+                </a:solidFill>
+                <a:latin typeface="DM Sans"/>
+              </a:rPr>
+              <a:t>18</a:t>
+            </a:r>
+            <a:endParaRPr sz="825" b="0" i="0" u="none">
+              <a:solidFill>
+                <a:srgbClr val="94A3B8"/>
+              </a:solidFill>
+              <a:latin typeface="DM Sans"/>
+            </a:endParaRPr>
           </a:p>
         </p:txBody>
       </p:sp>
@@ -13713,8 +13767,23 @@
                 </a:solidFill>
                 <a:latin typeface="DM Sans"/>
               </a:rPr>
-              <a:t>Slayt 20</a:t>
-            </a:r>
+              <a:t>Slayt </a:t>
+            </a:r>
+            <a:r>
+              <a:rPr lang="tr-TR" sz="900">
+                <a:solidFill>
+                  <a:srgbClr val="94A3B8"/>
+                </a:solidFill>
+                <a:latin typeface="DM Sans"/>
+              </a:rPr>
+              <a:t>19</a:t>
+            </a:r>
+            <a:endParaRPr sz="900" b="0" i="0" u="none">
+              <a:solidFill>
+                <a:srgbClr val="94A3B8"/>
+              </a:solidFill>
+              <a:latin typeface="DM Sans"/>
+            </a:endParaRPr>
           </a:p>
         </p:txBody>
       </p:sp>
@@ -24603,8 +24672,23 @@
                 </a:solidFill>
                 <a:latin typeface="DM Sans"/>
               </a:rPr>
-              <a:t>Slayt 22</a:t>
-            </a:r>
+              <a:t>Slayt 2</a:t>
+            </a:r>
+            <a:r>
+              <a:rPr lang="tr-TR" sz="900" b="0" i="0" u="none">
+                <a:solidFill>
+                  <a:srgbClr val="94A3B8"/>
+                </a:solidFill>
+                <a:latin typeface="DM Sans"/>
+              </a:rPr>
+              <a:t>1</a:t>
+            </a:r>
+            <a:endParaRPr sz="900" b="0" i="0" u="none">
+              <a:solidFill>
+                <a:srgbClr val="94A3B8"/>
+              </a:solidFill>
+              <a:latin typeface="DM Sans"/>
+            </a:endParaRPr>
           </a:p>
         </p:txBody>
       </p:sp>
@@ -25672,8 +25756,8 @@
         </p:nvSpPr>
         <p:spPr>
           <a:xfrm>
-            <a:off x="11201400" y="6534150"/>
-            <a:ext cx="323850" cy="133350"/>
+            <a:off x="11201399" y="6534150"/>
+            <a:ext cx="488373" cy="126958"/>
           </a:xfrm>
           <a:prstGeom prst="rect">
             <a:avLst/>
@@ -25694,8 +25778,23 @@
                 </a:solidFill>
                 <a:latin typeface="DM Sans"/>
               </a:rPr>
-              <a:t>Slayt 8</a:t>
-            </a:r>
+              <a:t>Slayt </a:t>
+            </a:r>
+            <a:r>
+              <a:rPr lang="tr-TR" sz="825" b="0" i="0" u="none">
+                <a:solidFill>
+                  <a:srgbClr val="94A3B8"/>
+                </a:solidFill>
+                <a:latin typeface="DM Sans"/>
+              </a:rPr>
+              <a:t>22</a:t>
+            </a:r>
+            <a:endParaRPr sz="825" b="0" i="0" u="none">
+              <a:solidFill>
+                <a:srgbClr val="94A3B8"/>
+              </a:solidFill>
+              <a:latin typeface="DM Sans"/>
+            </a:endParaRPr>
           </a:p>
         </p:txBody>
       </p:sp>
@@ -26257,8 +26356,23 @@
                 </a:solidFill>
                 <a:latin typeface="DM Sans"/>
               </a:rPr>
-              <a:t>Slayt 24</a:t>
-            </a:r>
+              <a:t>Slayt 2</a:t>
+            </a:r>
+            <a:r>
+              <a:rPr lang="tr-TR" sz="900" b="0" i="0" u="none">
+                <a:solidFill>
+                  <a:srgbClr val="94A3B8"/>
+                </a:solidFill>
+                <a:latin typeface="DM Sans"/>
+              </a:rPr>
+              <a:t>3</a:t>
+            </a:r>
+            <a:endParaRPr sz="900" b="0" i="0" u="none">
+              <a:solidFill>
+                <a:srgbClr val="94A3B8"/>
+              </a:solidFill>
+              <a:latin typeface="DM Sans"/>
+            </a:endParaRPr>
           </a:p>
         </p:txBody>
       </p:sp>
@@ -27049,8 +27163,23 @@
                 </a:solidFill>
                 <a:latin typeface="DM Sans"/>
               </a:rPr>
-              <a:t>Slayt 25</a:t>
-            </a:r>
+              <a:t>Slayt 2</a:t>
+            </a:r>
+            <a:r>
+              <a:rPr lang="tr-TR" sz="900" b="0" i="0" u="none">
+                <a:solidFill>
+                  <a:srgbClr val="94A3B8"/>
+                </a:solidFill>
+                <a:latin typeface="DM Sans"/>
+              </a:rPr>
+              <a:t>4</a:t>
+            </a:r>
+            <a:endParaRPr sz="900" b="0" i="0" u="none">
+              <a:solidFill>
+                <a:srgbClr val="94A3B8"/>
+              </a:solidFill>
+              <a:latin typeface="DM Sans"/>
+            </a:endParaRPr>
           </a:p>
         </p:txBody>
       </p:sp>
@@ -28583,8 +28712,23 @@
                 </a:solidFill>
                 <a:latin typeface="DM Sans"/>
               </a:rPr>
-              <a:t>Slayt 26</a:t>
-            </a:r>
+              <a:t>Slayt 2</a:t>
+            </a:r>
+            <a:r>
+              <a:rPr lang="tr-TR" sz="900" b="0" i="0" u="none">
+                <a:solidFill>
+                  <a:srgbClr val="94A3B8"/>
+                </a:solidFill>
+                <a:latin typeface="DM Sans"/>
+              </a:rPr>
+              <a:t>5</a:t>
+            </a:r>
+            <a:endParaRPr sz="900" b="0" i="0" u="none">
+              <a:solidFill>
+                <a:srgbClr val="94A3B8"/>
+              </a:solidFill>
+              <a:latin typeface="DM Sans"/>
+            </a:endParaRPr>
           </a:p>
         </p:txBody>
       </p:sp>
@@ -32131,7 +32275,7 @@
         <p:spPr>
           <a:xfrm>
             <a:off x="11210925" y="6534150"/>
-            <a:ext cx="314325" cy="253916"/>
+            <a:ext cx="478848" cy="126958"/>
           </a:xfrm>
           <a:prstGeom prst="rect">
             <a:avLst/>
@@ -32987,13 +33131,13 @@
               <a:t> %3</a:t>
             </a:r>
             <a:r>
-              <a:rPr lang="tr-TR" sz="1200" b="0" i="0" u="none" dirty="0">
+              <a:rPr lang="tr-TR" sz="1200" dirty="0">
                 <a:solidFill>
                   <a:srgbClr val="334155"/>
                 </a:solidFill>
                 <a:latin typeface="DM Sans"/>
               </a:rPr>
-              <a:t>0</a:t>
+              <a:t>6</a:t>
             </a:r>
             <a:r>
               <a:rPr sz="1200" b="0" i="0" u="none" dirty="0">
@@ -35318,7 +35462,7 @@
         <p:spPr>
           <a:xfrm>
             <a:off x="11201400" y="6534150"/>
-            <a:ext cx="323850" cy="133350"/>
+            <a:ext cx="323850" cy="126958"/>
           </a:xfrm>
           <a:prstGeom prst="rect">
             <a:avLst/>
@@ -35339,8 +35483,23 @@
                 </a:solidFill>
                 <a:latin typeface="DM Sans"/>
               </a:rPr>
-              <a:t>Slayt 4</a:t>
-            </a:r>
+              <a:t>Slayt </a:t>
+            </a:r>
+            <a:r>
+              <a:rPr lang="tr-TR" sz="825" b="0" i="0" u="none">
+                <a:solidFill>
+                  <a:srgbClr val="94A3B8"/>
+                </a:solidFill>
+                <a:latin typeface="DM Sans"/>
+              </a:rPr>
+              <a:t>7</a:t>
+            </a:r>
+            <a:endParaRPr sz="825" b="0" i="0" u="none">
+              <a:solidFill>
+                <a:srgbClr val="94A3B8"/>
+              </a:solidFill>
+              <a:latin typeface="DM Sans"/>
+            </a:endParaRPr>
           </a:p>
         </p:txBody>
       </p:sp>
